--- a/Soutenance_DRL.pptx
+++ b/Soutenance_DRL.pptx
@@ -3319,25 +3319,6 @@
               <a:t>[compléter les noms complets]</a:t>
             </a:r>
           </a:p>
-          <a:p>
-            <a:pPr algn="ctr">
-              <a:spcBef>
-                <a:spcPts val="0"/>
-              </a:spcBef>
-              <a:spcAft>
-                <a:spcPts val="600"/>
-              </a:spcAft>
-            </a:pPr>
-            <a:r>
-              <a:rPr sz="1200" b="0" i="0">
-                <a:solidFill>
-                  <a:srgbClr val="606674"/>
-                </a:solidFill>
-                <a:latin typeface="Calibri"/>
-              </a:rPr>
-              <a:t>github.com/KaabiOmar/drl-project</a:t>
-            </a:r>
-          </a:p>
         </p:txBody>
       </p:sp>
     </p:spTree>
@@ -12197,32 +12178,13 @@
               </a:spcAft>
             </a:pPr>
             <a:r>
-              <a:rPr sz="1500" b="0" i="0">
+              <a:rPr sz="1400" b="0" i="0">
                 <a:solidFill>
                   <a:srgbClr val="606674"/>
                 </a:solidFill>
                 <a:latin typeface="Calibri"/>
               </a:rPr>
-              <a:t>github.com/KaabiOmar/drl-project</a:t>
-            </a:r>
-          </a:p>
-          <a:p>
-            <a:pPr algn="ctr">
-              <a:spcBef>
-                <a:spcPts val="0"/>
-              </a:spcBef>
-              <a:spcAft>
-                <a:spcPts val="600"/>
-              </a:spcAft>
-            </a:pPr>
-            <a:r>
-              <a:rPr sz="1300" b="0" i="0">
-                <a:solidFill>
-                  <a:srgbClr val="606674"/>
-                </a:solidFill>
-                <a:latin typeface="Calibri"/>
-              </a:rPr>
-              <a:t>165 entraînements · 11 agents · 4 environnements · 30 tests unitaires</a:t>
+              <a:t>165 entraînements · 11 agents · 4 environnements · 3 graines</a:t>
             </a:r>
           </a:p>
         </p:txBody>

--- a/Soutenance_DRL.pptx
+++ b/Soutenance_DRL.pptx
@@ -3287,7 +3287,7 @@
                 <a:spcPts val="0"/>
               </a:spcBef>
               <a:spcAft>
-                <a:spcPts val="300"/>
+                <a:spcPts val="800"/>
               </a:spcAft>
             </a:pPr>
             <a:r>
@@ -3298,25 +3298,6 @@
                 <a:latin typeface="Calibri"/>
               </a:rPr>
               <a:t>Omar Kaabi · Awatef B. · Viet Hoang</a:t>
-            </a:r>
-          </a:p>
-          <a:p>
-            <a:pPr algn="ctr">
-              <a:spcBef>
-                <a:spcPts val="0"/>
-              </a:spcBef>
-              <a:spcAft>
-                <a:spcPts val="800"/>
-              </a:spcAft>
-            </a:pPr>
-            <a:r>
-              <a:rPr sz="1100" b="0" i="1">
-                <a:solidFill>
-                  <a:srgbClr val="606674"/>
-                </a:solidFill>
-                <a:latin typeface="Calibri"/>
-              </a:rPr>
-              <a:t>[compléter les noms complets]</a:t>
             </a:r>
           </a:p>
         </p:txBody>

--- a/Soutenance_DRL.pptx
+++ b/Soutenance_DRL.pptx
@@ -13007,7 +13007,7 @@
                 </a:solidFill>
                 <a:latin typeface="Calibri"/>
               </a:rPr>
-              <a:t>Remplacer l'adversaire aléatoire par un adversaire compétent. Notre meilleur agent gagne 99,3 % des parties mais ignore 31,8 % des menaces adverses : il a appris à exploiter un adversaire faible, pas à jouer au morpion.</a:t>
+              <a:t>Remplacer l'adversaire aléatoire par un adversaire compétent. Notre meilleur agent gagne 99,0 % des parties mais ignore 20,1 % des menaces adverses : il a appris à exploiter un adversaire faible, pas à jouer au morpion.</a:t>
             </a:r>
           </a:p>
         </p:txBody>
